--- a/留一顆心填滿耶穌.pptx
+++ b/留一顆心填滿耶穌.pptx
@@ -5,9 +5,13 @@
     <p:sldMasterId id="2147483677" r:id="rId1"/>
   </p:sldMasterIdLst>
   <p:sldIdLst>
-    <p:sldId id="256" r:id="rId2"/>
-    <p:sldId id="257" r:id="rId3"/>
-    <p:sldId id="258" r:id="rId4"/>
+    <p:sldId id="391" r:id="rId2"/>
+    <p:sldId id="392" r:id="rId3"/>
+    <p:sldId id="393" r:id="rId4"/>
+    <p:sldId id="394" r:id="rId5"/>
+    <p:sldId id="395" r:id="rId6"/>
+    <p:sldId id="396" r:id="rId7"/>
+    <p:sldId id="397" r:id="rId8"/>
   </p:sldIdLst>
   <p:sldSz cx="12192000" cy="6858000"/>
   <p:notesSz cx="6858000" cy="9144000"/>
@@ -163,10 +167,9 @@
           <a:lstStyle/>
           <a:p>
             <a:r>
-              <a:rPr lang="zh-TW" altLang="en-US" smtClean="0"/>
+              <a:rPr lang="zh-TW" altLang="en-US"/>
               <a:t>按一下以編輯母片標題樣式</a:t>
             </a:r>
-            <a:endParaRPr lang="zh-TW" altLang="en-US"/>
           </a:p>
         </p:txBody>
       </p:sp>
@@ -282,10 +285,9 @@
           </a:lstStyle>
           <a:p>
             <a:r>
-              <a:rPr lang="zh-TW" altLang="en-US" smtClean="0"/>
+              <a:rPr lang="zh-TW" altLang="en-US"/>
               <a:t>按一下以編輯母片副標題樣式</a:t>
             </a:r>
-            <a:endParaRPr lang="zh-TW" altLang="en-US"/>
           </a:p>
         </p:txBody>
       </p:sp>
@@ -307,7 +309,7 @@
             <a:fld id="{7E0BEDDC-2D50-45A6-9378-C7887BCE4287}" type="datetimeFigureOut">
               <a:rPr lang="en-US" smtClean="0"/>
               <a:pPr/>
-              <a:t>8/21/2020</a:t>
+              <a:t>2/6/2026</a:t>
             </a:fld>
             <a:endParaRPr lang="en-US"/>
           </a:p>
@@ -397,10 +399,9 @@
           <a:lstStyle/>
           <a:p>
             <a:r>
-              <a:rPr lang="zh-TW" altLang="en-US" smtClean="0"/>
+              <a:rPr lang="zh-TW" altLang="en-US"/>
               <a:t>按一下以編輯母片標題樣式</a:t>
             </a:r>
-            <a:endParaRPr lang="zh-TW" altLang="en-US"/>
           </a:p>
         </p:txBody>
       </p:sp>
@@ -421,38 +422,37 @@
           <a:p>
             <a:pPr lvl="0"/>
             <a:r>
-              <a:rPr lang="zh-TW" altLang="en-US" smtClean="0"/>
+              <a:rPr lang="zh-TW" altLang="en-US"/>
               <a:t>按一下以編輯母片文字樣式</a:t>
             </a:r>
           </a:p>
           <a:p>
             <a:pPr lvl="1"/>
             <a:r>
-              <a:rPr lang="zh-TW" altLang="en-US" smtClean="0"/>
+              <a:rPr lang="zh-TW" altLang="en-US"/>
               <a:t>第二層</a:t>
             </a:r>
           </a:p>
           <a:p>
             <a:pPr lvl="2"/>
             <a:r>
-              <a:rPr lang="zh-TW" altLang="en-US" smtClean="0"/>
+              <a:rPr lang="zh-TW" altLang="en-US"/>
               <a:t>第三層</a:t>
             </a:r>
           </a:p>
           <a:p>
             <a:pPr lvl="3"/>
             <a:r>
-              <a:rPr lang="zh-TW" altLang="en-US" smtClean="0"/>
+              <a:rPr lang="zh-TW" altLang="en-US"/>
               <a:t>第四層</a:t>
             </a:r>
           </a:p>
           <a:p>
             <a:pPr lvl="4"/>
             <a:r>
-              <a:rPr lang="zh-TW" altLang="en-US" smtClean="0"/>
+              <a:rPr lang="zh-TW" altLang="en-US"/>
               <a:t>第五層</a:t>
             </a:r>
-            <a:endParaRPr lang="zh-TW" altLang="en-US"/>
           </a:p>
         </p:txBody>
       </p:sp>
@@ -474,7 +474,7 @@
             <a:fld id="{7E0BEDDC-2D50-45A6-9378-C7887BCE4287}" type="datetimeFigureOut">
               <a:rPr lang="en-US" smtClean="0"/>
               <a:pPr/>
-              <a:t>8/21/2020</a:t>
+              <a:t>2/6/2026</a:t>
             </a:fld>
             <a:endParaRPr lang="en-US"/>
           </a:p>
@@ -569,10 +569,9 @@
           <a:lstStyle/>
           <a:p>
             <a:r>
-              <a:rPr lang="zh-TW" altLang="en-US" smtClean="0"/>
+              <a:rPr lang="zh-TW" altLang="en-US"/>
               <a:t>按一下以編輯母片標題樣式</a:t>
             </a:r>
-            <a:endParaRPr lang="zh-TW" altLang="en-US"/>
           </a:p>
         </p:txBody>
       </p:sp>
@@ -598,38 +597,37 @@
           <a:p>
             <a:pPr lvl="0"/>
             <a:r>
-              <a:rPr lang="zh-TW" altLang="en-US" smtClean="0"/>
+              <a:rPr lang="zh-TW" altLang="en-US"/>
               <a:t>按一下以編輯母片文字樣式</a:t>
             </a:r>
           </a:p>
           <a:p>
             <a:pPr lvl="1"/>
             <a:r>
-              <a:rPr lang="zh-TW" altLang="en-US" smtClean="0"/>
+              <a:rPr lang="zh-TW" altLang="en-US"/>
               <a:t>第二層</a:t>
             </a:r>
           </a:p>
           <a:p>
             <a:pPr lvl="2"/>
             <a:r>
-              <a:rPr lang="zh-TW" altLang="en-US" smtClean="0"/>
+              <a:rPr lang="zh-TW" altLang="en-US"/>
               <a:t>第三層</a:t>
             </a:r>
           </a:p>
           <a:p>
             <a:pPr lvl="3"/>
             <a:r>
-              <a:rPr lang="zh-TW" altLang="en-US" smtClean="0"/>
+              <a:rPr lang="zh-TW" altLang="en-US"/>
               <a:t>第四層</a:t>
             </a:r>
           </a:p>
           <a:p>
             <a:pPr lvl="4"/>
             <a:r>
-              <a:rPr lang="zh-TW" altLang="en-US" smtClean="0"/>
+              <a:rPr lang="zh-TW" altLang="en-US"/>
               <a:t>第五層</a:t>
             </a:r>
-            <a:endParaRPr lang="zh-TW" altLang="en-US"/>
           </a:p>
         </p:txBody>
       </p:sp>
@@ -651,7 +649,7 @@
             <a:fld id="{7E0BEDDC-2D50-45A6-9378-C7887BCE4287}" type="datetimeFigureOut">
               <a:rPr lang="en-US" smtClean="0"/>
               <a:pPr/>
-              <a:t>8/21/2020</a:t>
+              <a:t>2/6/2026</a:t>
             </a:fld>
             <a:endParaRPr lang="en-US"/>
           </a:p>
@@ -741,10 +739,9 @@
           <a:lstStyle/>
           <a:p>
             <a:r>
-              <a:rPr lang="zh-TW" altLang="en-US" smtClean="0"/>
+              <a:rPr lang="zh-TW" altLang="en-US"/>
               <a:t>按一下以編輯母片標題樣式</a:t>
             </a:r>
-            <a:endParaRPr lang="zh-TW" altLang="en-US"/>
           </a:p>
         </p:txBody>
       </p:sp>
@@ -765,38 +762,37 @@
           <a:p>
             <a:pPr lvl="0"/>
             <a:r>
-              <a:rPr lang="zh-TW" altLang="en-US" smtClean="0"/>
+              <a:rPr lang="zh-TW" altLang="en-US"/>
               <a:t>按一下以編輯母片文字樣式</a:t>
             </a:r>
           </a:p>
           <a:p>
             <a:pPr lvl="1"/>
             <a:r>
-              <a:rPr lang="zh-TW" altLang="en-US" smtClean="0"/>
+              <a:rPr lang="zh-TW" altLang="en-US"/>
               <a:t>第二層</a:t>
             </a:r>
           </a:p>
           <a:p>
             <a:pPr lvl="2"/>
             <a:r>
-              <a:rPr lang="zh-TW" altLang="en-US" smtClean="0"/>
+              <a:rPr lang="zh-TW" altLang="en-US"/>
               <a:t>第三層</a:t>
             </a:r>
           </a:p>
           <a:p>
             <a:pPr lvl="3"/>
             <a:r>
-              <a:rPr lang="zh-TW" altLang="en-US" smtClean="0"/>
+              <a:rPr lang="zh-TW" altLang="en-US"/>
               <a:t>第四層</a:t>
             </a:r>
           </a:p>
           <a:p>
             <a:pPr lvl="4"/>
             <a:r>
-              <a:rPr lang="zh-TW" altLang="en-US" smtClean="0"/>
+              <a:rPr lang="zh-TW" altLang="en-US"/>
               <a:t>第五層</a:t>
             </a:r>
-            <a:endParaRPr lang="zh-TW" altLang="en-US"/>
           </a:p>
         </p:txBody>
       </p:sp>
@@ -818,7 +814,7 @@
             <a:fld id="{7E0BEDDC-2D50-45A6-9378-C7887BCE4287}" type="datetimeFigureOut">
               <a:rPr lang="en-US" smtClean="0"/>
               <a:pPr/>
-              <a:t>8/21/2020</a:t>
+              <a:t>2/6/2026</a:t>
             </a:fld>
             <a:endParaRPr lang="en-US"/>
           </a:p>
@@ -917,10 +913,9 @@
           </a:lstStyle>
           <a:p>
             <a:r>
-              <a:rPr lang="zh-TW" altLang="en-US" smtClean="0"/>
+              <a:rPr lang="zh-TW" altLang="en-US"/>
               <a:t>按一下以編輯母片標題樣式</a:t>
             </a:r>
-            <a:endParaRPr lang="zh-TW" altLang="en-US"/>
           </a:p>
         </p:txBody>
       </p:sp>
@@ -1037,7 +1032,7 @@
           <a:p>
             <a:pPr lvl="0"/>
             <a:r>
-              <a:rPr lang="zh-TW" altLang="en-US" smtClean="0"/>
+              <a:rPr lang="zh-TW" altLang="en-US"/>
               <a:t>按一下以編輯母片文字樣式</a:t>
             </a:r>
           </a:p>
@@ -1061,7 +1056,7 @@
             <a:fld id="{7E0BEDDC-2D50-45A6-9378-C7887BCE4287}" type="datetimeFigureOut">
               <a:rPr lang="en-US" smtClean="0"/>
               <a:pPr/>
-              <a:t>8/21/2020</a:t>
+              <a:t>2/6/2026</a:t>
             </a:fld>
             <a:endParaRPr lang="en-US"/>
           </a:p>
@@ -1151,10 +1146,9 @@
           <a:lstStyle/>
           <a:p>
             <a:r>
-              <a:rPr lang="zh-TW" altLang="en-US" smtClean="0"/>
+              <a:rPr lang="zh-TW" altLang="en-US"/>
               <a:t>按一下以編輯母片標題樣式</a:t>
             </a:r>
-            <a:endParaRPr lang="zh-TW" altLang="en-US"/>
           </a:p>
         </p:txBody>
       </p:sp>
@@ -1208,38 +1202,37 @@
           <a:p>
             <a:pPr lvl="0"/>
             <a:r>
-              <a:rPr lang="zh-TW" altLang="en-US" smtClean="0"/>
+              <a:rPr lang="zh-TW" altLang="en-US"/>
               <a:t>按一下以編輯母片文字樣式</a:t>
             </a:r>
           </a:p>
           <a:p>
             <a:pPr lvl="1"/>
             <a:r>
-              <a:rPr lang="zh-TW" altLang="en-US" smtClean="0"/>
+              <a:rPr lang="zh-TW" altLang="en-US"/>
               <a:t>第二層</a:t>
             </a:r>
           </a:p>
           <a:p>
             <a:pPr lvl="2"/>
             <a:r>
-              <a:rPr lang="zh-TW" altLang="en-US" smtClean="0"/>
+              <a:rPr lang="zh-TW" altLang="en-US"/>
               <a:t>第三層</a:t>
             </a:r>
           </a:p>
           <a:p>
             <a:pPr lvl="3"/>
             <a:r>
-              <a:rPr lang="zh-TW" altLang="en-US" smtClean="0"/>
+              <a:rPr lang="zh-TW" altLang="en-US"/>
               <a:t>第四層</a:t>
             </a:r>
           </a:p>
           <a:p>
             <a:pPr lvl="4"/>
             <a:r>
-              <a:rPr lang="zh-TW" altLang="en-US" smtClean="0"/>
+              <a:rPr lang="zh-TW" altLang="en-US"/>
               <a:t>第五層</a:t>
             </a:r>
-            <a:endParaRPr lang="zh-TW" altLang="en-US"/>
           </a:p>
         </p:txBody>
       </p:sp>
@@ -1293,38 +1286,37 @@
           <a:p>
             <a:pPr lvl="0"/>
             <a:r>
-              <a:rPr lang="zh-TW" altLang="en-US" smtClean="0"/>
+              <a:rPr lang="zh-TW" altLang="en-US"/>
               <a:t>按一下以編輯母片文字樣式</a:t>
             </a:r>
           </a:p>
           <a:p>
             <a:pPr lvl="1"/>
             <a:r>
-              <a:rPr lang="zh-TW" altLang="en-US" smtClean="0"/>
+              <a:rPr lang="zh-TW" altLang="en-US"/>
               <a:t>第二層</a:t>
             </a:r>
           </a:p>
           <a:p>
             <a:pPr lvl="2"/>
             <a:r>
-              <a:rPr lang="zh-TW" altLang="en-US" smtClean="0"/>
+              <a:rPr lang="zh-TW" altLang="en-US"/>
               <a:t>第三層</a:t>
             </a:r>
           </a:p>
           <a:p>
             <a:pPr lvl="3"/>
             <a:r>
-              <a:rPr lang="zh-TW" altLang="en-US" smtClean="0"/>
+              <a:rPr lang="zh-TW" altLang="en-US"/>
               <a:t>第四層</a:t>
             </a:r>
           </a:p>
           <a:p>
             <a:pPr lvl="4"/>
             <a:r>
-              <a:rPr lang="zh-TW" altLang="en-US" smtClean="0"/>
+              <a:rPr lang="zh-TW" altLang="en-US"/>
               <a:t>第五層</a:t>
             </a:r>
-            <a:endParaRPr lang="zh-TW" altLang="en-US"/>
           </a:p>
         </p:txBody>
       </p:sp>
@@ -1346,7 +1338,7 @@
             <a:fld id="{7E0BEDDC-2D50-45A6-9378-C7887BCE4287}" type="datetimeFigureOut">
               <a:rPr lang="en-US" smtClean="0"/>
               <a:pPr/>
-              <a:t>8/21/2020</a:t>
+              <a:t>2/6/2026</a:t>
             </a:fld>
             <a:endParaRPr lang="en-US"/>
           </a:p>
@@ -1440,10 +1432,9 @@
           </a:lstStyle>
           <a:p>
             <a:r>
-              <a:rPr lang="zh-TW" altLang="en-US" smtClean="0"/>
+              <a:rPr lang="zh-TW" altLang="en-US"/>
               <a:t>按一下以編輯母片標題樣式</a:t>
             </a:r>
-            <a:endParaRPr lang="zh-TW" altLang="en-US"/>
           </a:p>
         </p:txBody>
       </p:sp>
@@ -1506,7 +1497,7 @@
           <a:p>
             <a:pPr lvl="0"/>
             <a:r>
-              <a:rPr lang="zh-TW" altLang="en-US" smtClean="0"/>
+              <a:rPr lang="zh-TW" altLang="en-US"/>
               <a:t>按一下以編輯母片文字樣式</a:t>
             </a:r>
           </a:p>
@@ -1562,38 +1553,37 @@
           <a:p>
             <a:pPr lvl="0"/>
             <a:r>
-              <a:rPr lang="zh-TW" altLang="en-US" smtClean="0"/>
+              <a:rPr lang="zh-TW" altLang="en-US"/>
               <a:t>按一下以編輯母片文字樣式</a:t>
             </a:r>
           </a:p>
           <a:p>
             <a:pPr lvl="1"/>
             <a:r>
-              <a:rPr lang="zh-TW" altLang="en-US" smtClean="0"/>
+              <a:rPr lang="zh-TW" altLang="en-US"/>
               <a:t>第二層</a:t>
             </a:r>
           </a:p>
           <a:p>
             <a:pPr lvl="2"/>
             <a:r>
-              <a:rPr lang="zh-TW" altLang="en-US" smtClean="0"/>
+              <a:rPr lang="zh-TW" altLang="en-US"/>
               <a:t>第三層</a:t>
             </a:r>
           </a:p>
           <a:p>
             <a:pPr lvl="3"/>
             <a:r>
-              <a:rPr lang="zh-TW" altLang="en-US" smtClean="0"/>
+              <a:rPr lang="zh-TW" altLang="en-US"/>
               <a:t>第四層</a:t>
             </a:r>
           </a:p>
           <a:p>
             <a:pPr lvl="4"/>
             <a:r>
-              <a:rPr lang="zh-TW" altLang="en-US" smtClean="0"/>
+              <a:rPr lang="zh-TW" altLang="en-US"/>
               <a:t>第五層</a:t>
             </a:r>
-            <a:endParaRPr lang="zh-TW" altLang="en-US"/>
           </a:p>
         </p:txBody>
       </p:sp>
@@ -1656,7 +1646,7 @@
           <a:p>
             <a:pPr lvl="0"/>
             <a:r>
-              <a:rPr lang="zh-TW" altLang="en-US" smtClean="0"/>
+              <a:rPr lang="zh-TW" altLang="en-US"/>
               <a:t>按一下以編輯母片文字樣式</a:t>
             </a:r>
           </a:p>
@@ -1712,38 +1702,37 @@
           <a:p>
             <a:pPr lvl="0"/>
             <a:r>
-              <a:rPr lang="zh-TW" altLang="en-US" smtClean="0"/>
+              <a:rPr lang="zh-TW" altLang="en-US"/>
               <a:t>按一下以編輯母片文字樣式</a:t>
             </a:r>
           </a:p>
           <a:p>
             <a:pPr lvl="1"/>
             <a:r>
-              <a:rPr lang="zh-TW" altLang="en-US" smtClean="0"/>
+              <a:rPr lang="zh-TW" altLang="en-US"/>
               <a:t>第二層</a:t>
             </a:r>
           </a:p>
           <a:p>
             <a:pPr lvl="2"/>
             <a:r>
-              <a:rPr lang="zh-TW" altLang="en-US" smtClean="0"/>
+              <a:rPr lang="zh-TW" altLang="en-US"/>
               <a:t>第三層</a:t>
             </a:r>
           </a:p>
           <a:p>
             <a:pPr lvl="3"/>
             <a:r>
-              <a:rPr lang="zh-TW" altLang="en-US" smtClean="0"/>
+              <a:rPr lang="zh-TW" altLang="en-US"/>
               <a:t>第四層</a:t>
             </a:r>
           </a:p>
           <a:p>
             <a:pPr lvl="4"/>
             <a:r>
-              <a:rPr lang="zh-TW" altLang="en-US" smtClean="0"/>
+              <a:rPr lang="zh-TW" altLang="en-US"/>
               <a:t>第五層</a:t>
             </a:r>
-            <a:endParaRPr lang="zh-TW" altLang="en-US"/>
           </a:p>
         </p:txBody>
       </p:sp>
@@ -1765,7 +1754,7 @@
             <a:fld id="{7E0BEDDC-2D50-45A6-9378-C7887BCE4287}" type="datetimeFigureOut">
               <a:rPr lang="en-US" smtClean="0"/>
               <a:pPr/>
-              <a:t>8/21/2020</a:t>
+              <a:t>2/6/2026</a:t>
             </a:fld>
             <a:endParaRPr lang="en-US"/>
           </a:p>
@@ -1855,10 +1844,9 @@
           <a:lstStyle/>
           <a:p>
             <a:r>
-              <a:rPr lang="zh-TW" altLang="en-US" smtClean="0"/>
+              <a:rPr lang="zh-TW" altLang="en-US"/>
               <a:t>按一下以編輯母片標題樣式</a:t>
             </a:r>
-            <a:endParaRPr lang="zh-TW" altLang="en-US"/>
           </a:p>
         </p:txBody>
       </p:sp>
@@ -1880,7 +1868,7 @@
             <a:fld id="{7E0BEDDC-2D50-45A6-9378-C7887BCE4287}" type="datetimeFigureOut">
               <a:rPr lang="en-US" smtClean="0"/>
               <a:pPr/>
-              <a:t>8/21/2020</a:t>
+              <a:t>2/6/2026</a:t>
             </a:fld>
             <a:endParaRPr lang="en-US"/>
           </a:p>
@@ -1972,7 +1960,7 @@
             <a:fld id="{7E0BEDDC-2D50-45A6-9378-C7887BCE4287}" type="datetimeFigureOut">
               <a:rPr lang="en-US" smtClean="0"/>
               <a:pPr/>
-              <a:t>8/21/2020</a:t>
+              <a:t>2/6/2026</a:t>
             </a:fld>
             <a:endParaRPr lang="en-US"/>
           </a:p>
@@ -2071,10 +2059,9 @@
           </a:lstStyle>
           <a:p>
             <a:r>
-              <a:rPr lang="zh-TW" altLang="en-US" smtClean="0"/>
+              <a:rPr lang="zh-TW" altLang="en-US"/>
               <a:t>按一下以編輯母片標題樣式</a:t>
             </a:r>
-            <a:endParaRPr lang="zh-TW" altLang="en-US"/>
           </a:p>
         </p:txBody>
       </p:sp>
@@ -2128,38 +2115,37 @@
           <a:p>
             <a:pPr lvl="0"/>
             <a:r>
-              <a:rPr lang="zh-TW" altLang="en-US" smtClean="0"/>
+              <a:rPr lang="zh-TW" altLang="en-US"/>
               <a:t>按一下以編輯母片文字樣式</a:t>
             </a:r>
           </a:p>
           <a:p>
             <a:pPr lvl="1"/>
             <a:r>
-              <a:rPr lang="zh-TW" altLang="en-US" smtClean="0"/>
+              <a:rPr lang="zh-TW" altLang="en-US"/>
               <a:t>第二層</a:t>
             </a:r>
           </a:p>
           <a:p>
             <a:pPr lvl="2"/>
             <a:r>
-              <a:rPr lang="zh-TW" altLang="en-US" smtClean="0"/>
+              <a:rPr lang="zh-TW" altLang="en-US"/>
               <a:t>第三層</a:t>
             </a:r>
           </a:p>
           <a:p>
             <a:pPr lvl="3"/>
             <a:r>
-              <a:rPr lang="zh-TW" altLang="en-US" smtClean="0"/>
+              <a:rPr lang="zh-TW" altLang="en-US"/>
               <a:t>第四層</a:t>
             </a:r>
           </a:p>
           <a:p>
             <a:pPr lvl="4"/>
             <a:r>
-              <a:rPr lang="zh-TW" altLang="en-US" smtClean="0"/>
+              <a:rPr lang="zh-TW" altLang="en-US"/>
               <a:t>第五層</a:t>
             </a:r>
-            <a:endParaRPr lang="zh-TW" altLang="en-US"/>
           </a:p>
         </p:txBody>
       </p:sp>
@@ -2222,7 +2208,7 @@
           <a:p>
             <a:pPr lvl="0"/>
             <a:r>
-              <a:rPr lang="zh-TW" altLang="en-US" smtClean="0"/>
+              <a:rPr lang="zh-TW" altLang="en-US"/>
               <a:t>按一下以編輯母片文字樣式</a:t>
             </a:r>
           </a:p>
@@ -2246,7 +2232,7 @@
             <a:fld id="{7E0BEDDC-2D50-45A6-9378-C7887BCE4287}" type="datetimeFigureOut">
               <a:rPr lang="en-US" smtClean="0"/>
               <a:pPr/>
-              <a:t>8/21/2020</a:t>
+              <a:t>2/6/2026</a:t>
             </a:fld>
             <a:endParaRPr lang="en-US"/>
           </a:p>
@@ -2345,10 +2331,9 @@
           </a:lstStyle>
           <a:p>
             <a:r>
-              <a:rPr lang="zh-TW" altLang="en-US" smtClean="0"/>
+              <a:rPr lang="zh-TW" altLang="en-US"/>
               <a:t>按一下以編輯母片標題樣式</a:t>
             </a:r>
-            <a:endParaRPr lang="zh-TW" altLang="en-US"/>
           </a:p>
         </p:txBody>
       </p:sp>
@@ -2410,10 +2395,9 @@
           </a:lstStyle>
           <a:p>
             <a:r>
-              <a:rPr lang="zh-TW" altLang="en-US" smtClean="0"/>
+              <a:rPr lang="zh-TW" altLang="en-US"/>
               <a:t>按一下圖示以新增圖片</a:t>
             </a:r>
-            <a:endParaRPr lang="zh-TW" altLang="en-US"/>
           </a:p>
         </p:txBody>
       </p:sp>
@@ -2476,7 +2460,7 @@
           <a:p>
             <a:pPr lvl="0"/>
             <a:r>
-              <a:rPr lang="zh-TW" altLang="en-US" smtClean="0"/>
+              <a:rPr lang="zh-TW" altLang="en-US"/>
               <a:t>按一下以編輯母片文字樣式</a:t>
             </a:r>
           </a:p>
@@ -2500,7 +2484,7 @@
             <a:fld id="{7E0BEDDC-2D50-45A6-9378-C7887BCE4287}" type="datetimeFigureOut">
               <a:rPr lang="en-US" smtClean="0"/>
               <a:pPr/>
-              <a:t>8/21/2020</a:t>
+              <a:t>2/6/2026</a:t>
             </a:fld>
             <a:endParaRPr lang="en-US"/>
           </a:p>
@@ -2610,10 +2594,9 @@
           <a:lstStyle/>
           <a:p>
             <a:r>
-              <a:rPr lang="zh-TW" altLang="en-US" smtClean="0"/>
+              <a:rPr lang="zh-TW" altLang="en-US"/>
               <a:t>按一下以編輯母片標題樣式</a:t>
             </a:r>
-            <a:endParaRPr lang="zh-TW" altLang="en-US"/>
           </a:p>
         </p:txBody>
       </p:sp>
@@ -2644,38 +2627,37 @@
           <a:p>
             <a:pPr lvl="0"/>
             <a:r>
-              <a:rPr lang="zh-TW" altLang="en-US" smtClean="0"/>
+              <a:rPr lang="zh-TW" altLang="en-US"/>
               <a:t>按一下以編輯母片文字樣式</a:t>
             </a:r>
           </a:p>
           <a:p>
             <a:pPr lvl="1"/>
             <a:r>
-              <a:rPr lang="zh-TW" altLang="en-US" smtClean="0"/>
+              <a:rPr lang="zh-TW" altLang="en-US"/>
               <a:t>第二層</a:t>
             </a:r>
           </a:p>
           <a:p>
             <a:pPr lvl="2"/>
             <a:r>
-              <a:rPr lang="zh-TW" altLang="en-US" smtClean="0"/>
+              <a:rPr lang="zh-TW" altLang="en-US"/>
               <a:t>第三層</a:t>
             </a:r>
           </a:p>
           <a:p>
             <a:pPr lvl="3"/>
             <a:r>
-              <a:rPr lang="zh-TW" altLang="en-US" smtClean="0"/>
+              <a:rPr lang="zh-TW" altLang="en-US"/>
               <a:t>第四層</a:t>
             </a:r>
           </a:p>
           <a:p>
             <a:pPr lvl="4"/>
             <a:r>
-              <a:rPr lang="zh-TW" altLang="en-US" smtClean="0"/>
+              <a:rPr lang="zh-TW" altLang="en-US"/>
               <a:t>第五層</a:t>
             </a:r>
-            <a:endParaRPr lang="zh-TW" altLang="en-US"/>
           </a:p>
         </p:txBody>
       </p:sp>
@@ -2715,7 +2697,7 @@
             <a:fld id="{7E0BEDDC-2D50-45A6-9378-C7887BCE4287}" type="datetimeFigureOut">
               <a:rPr lang="en-US" smtClean="0"/>
               <a:pPr/>
-              <a:t>8/21/2020</a:t>
+              <a:t>2/6/2026</a:t>
             </a:fld>
             <a:endParaRPr lang="en-US"/>
           </a:p>
@@ -3074,7 +3056,13 @@
   <p:cSld>
     <p:spTree>
       <p:nvGrpSpPr>
-        <p:cNvPr id="1" name=""/>
+        <p:cNvPr id="1" name="">
+          <a:extLst>
+            <a:ext uri="{FF2B5EF4-FFF2-40B4-BE49-F238E27FC236}">
+              <a16:creationId xmlns:a16="http://schemas.microsoft.com/office/drawing/2014/main" id="{5F20F3D7-EDDF-CE30-9060-314A88E3730B}"/>
+            </a:ext>
+          </a:extLst>
+        </p:cNvPr>
         <p:cNvGrpSpPr/>
         <p:nvPr/>
       </p:nvGrpSpPr>
@@ -3088,7 +3076,13 @@
       </p:grpSpPr>
       <p:sp>
         <p:nvSpPr>
-          <p:cNvPr id="4" name="Title 3"/>
+          <p:cNvPr id="4" name="標題 3">
+            <a:extLst>
+              <a:ext uri="{FF2B5EF4-FFF2-40B4-BE49-F238E27FC236}">
+                <a16:creationId xmlns:a16="http://schemas.microsoft.com/office/drawing/2014/main" id="{CD6A41DD-B5E6-D530-EC0F-85726817D119}"/>
+              </a:ext>
+            </a:extLst>
+          </p:cNvPr>
           <p:cNvSpPr>
             <a:spLocks noGrp="1"/>
           </p:cNvSpPr>
@@ -3096,205 +3090,44 @@
             <p:ph type="title"/>
           </p:nvPr>
         </p:nvSpPr>
-        <p:spPr/>
+        <p:spPr>
+          <a:xfrm>
+            <a:off x="0" y="2660915"/>
+            <a:ext cx="12192000" cy="1143000"/>
+          </a:xfrm>
+        </p:spPr>
         <p:txBody>
           <a:bodyPr>
-            <a:normAutofit/>
+            <a:noAutofit/>
           </a:bodyPr>
           <a:lstStyle/>
           <a:p>
             <a:r>
-              <a:rPr lang="zh-TW" altLang="en-US" sz="4800" b="1" dirty="0">
+              <a:rPr lang="zh-TW" altLang="en-US" sz="7200" b="1" i="1" dirty="0">
                 <a:solidFill>
                   <a:srgbClr val="000066"/>
                 </a:solidFill>
+                <a:effectLst>
+                  <a:outerShdw blurRad="38100" dist="38100" dir="2700000" algn="tl">
+                    <a:srgbClr val="000000">
+                      <a:alpha val="43137"/>
+                    </a:srgbClr>
+                  </a:outerShdw>
+                </a:effectLst>
                 <a:latin typeface="微軟正黑體" pitchFamily="34" charset="-120"/>
                 <a:ea typeface="微軟正黑體" pitchFamily="34" charset="-120"/>
               </a:rPr>
               <a:t>留一顆心填滿耶穌</a:t>
             </a:r>
-            <a:endParaRPr lang="en-US" sz="4800" b="1" dirty="0">
-              <a:solidFill>
-                <a:srgbClr val="000066"/>
-              </a:solidFill>
-              <a:latin typeface="微軟正黑體" pitchFamily="34" charset="-120"/>
-              <a:ea typeface="微軟正黑體" pitchFamily="34" charset="-120"/>
-            </a:endParaRPr>
-          </a:p>
-        </p:txBody>
-      </p:sp>
-      <p:sp>
-        <p:nvSpPr>
-          <p:cNvPr id="5" name="Content Placeholder 4"/>
-          <p:cNvSpPr>
-            <a:spLocks noGrp="1"/>
-          </p:cNvSpPr>
-          <p:nvPr>
-            <p:ph idx="1"/>
-          </p:nvPr>
-        </p:nvSpPr>
-        <p:spPr>
-          <a:xfrm>
-            <a:off x="1524000" y="1600201"/>
-            <a:ext cx="9144000" cy="4525963"/>
-          </a:xfrm>
-        </p:spPr>
-        <p:txBody>
-          <a:bodyPr>
-            <a:normAutofit/>
-          </a:bodyPr>
-          <a:lstStyle/>
-          <a:p>
-            <a:pPr algn="ctr">
-              <a:buNone/>
-            </a:pPr>
-            <a:r>
-              <a:rPr lang="zh-TW" altLang="en-US" sz="5400" b="1" dirty="0">
-                <a:solidFill>
-                  <a:srgbClr val="000066"/>
-                </a:solidFill>
-                <a:latin typeface="微軟正黑體" pitchFamily="34" charset="-120"/>
-                <a:ea typeface="微軟正黑體" pitchFamily="34" charset="-120"/>
-              </a:rPr>
-              <a:t>留一顆心填滿耶</a:t>
-            </a:r>
-            <a:r>
-              <a:rPr lang="zh-TW" altLang="en-US" sz="5400" b="1" dirty="0">
-                <a:solidFill>
-                  <a:srgbClr val="000066"/>
-                </a:solidFill>
-                <a:latin typeface="微軟正黑體" pitchFamily="34" charset="-120"/>
-                <a:ea typeface="微軟正黑體" pitchFamily="34" charset="-120"/>
-              </a:rPr>
-              <a:t>穌</a:t>
-            </a:r>
-            <a:endParaRPr lang="en-US" altLang="zh-TW" sz="5400" b="1" dirty="0">
-              <a:solidFill>
-                <a:srgbClr val="000066"/>
-              </a:solidFill>
-              <a:latin typeface="微軟正黑體" pitchFamily="34" charset="-120"/>
-              <a:ea typeface="微軟正黑體" pitchFamily="34" charset="-120"/>
-            </a:endParaRPr>
-          </a:p>
-          <a:p>
-            <a:pPr algn="ctr">
-              <a:buNone/>
-            </a:pPr>
-            <a:r>
-              <a:rPr lang="zh-TW" altLang="en-US" sz="5400" b="1" dirty="0">
-                <a:solidFill>
-                  <a:srgbClr val="000066"/>
-                </a:solidFill>
-                <a:latin typeface="微軟正黑體" pitchFamily="34" charset="-120"/>
-                <a:ea typeface="微軟正黑體" pitchFamily="34" charset="-120"/>
-              </a:rPr>
-              <a:t>將</a:t>
-            </a:r>
-            <a:r>
-              <a:rPr lang="zh-TW" altLang="en-US" sz="5400" b="1" dirty="0">
-                <a:solidFill>
-                  <a:srgbClr val="000066"/>
-                </a:solidFill>
-                <a:latin typeface="微軟正黑體" pitchFamily="34" charset="-120"/>
-                <a:ea typeface="微軟正黑體" pitchFamily="34" charset="-120"/>
-              </a:rPr>
-              <a:t>我心換</a:t>
-            </a:r>
-            <a:r>
-              <a:rPr lang="zh-TW" altLang="en-US" sz="5400" b="1" dirty="0">
-                <a:solidFill>
-                  <a:srgbClr val="000066"/>
-                </a:solidFill>
-                <a:latin typeface="微軟正黑體" pitchFamily="34" charset="-120"/>
-                <a:ea typeface="微軟正黑體" pitchFamily="34" charset="-120"/>
-              </a:rPr>
-              <a:t>你</a:t>
-            </a:r>
-            <a:endParaRPr lang="en-US" altLang="zh-TW" sz="5400" b="1" dirty="0">
-              <a:solidFill>
-                <a:srgbClr val="000066"/>
-              </a:solidFill>
-              <a:latin typeface="微軟正黑體" pitchFamily="34" charset="-120"/>
-              <a:ea typeface="微軟正黑體" pitchFamily="34" charset="-120"/>
-            </a:endParaRPr>
-          </a:p>
-          <a:p>
-            <a:pPr algn="ctr">
-              <a:buNone/>
-            </a:pPr>
-            <a:r>
-              <a:rPr lang="zh-TW" altLang="en-US" sz="5400" b="1" dirty="0">
-                <a:solidFill>
-                  <a:srgbClr val="000066"/>
-                </a:solidFill>
-                <a:latin typeface="微軟正黑體" pitchFamily="34" charset="-120"/>
-                <a:ea typeface="微軟正黑體" pitchFamily="34" charset="-120"/>
-              </a:rPr>
-              <a:t>流</a:t>
-            </a:r>
-            <a:r>
-              <a:rPr lang="zh-TW" altLang="en-US" sz="5400" b="1" dirty="0">
-                <a:solidFill>
-                  <a:srgbClr val="000066"/>
-                </a:solidFill>
-                <a:latin typeface="微軟正黑體" pitchFamily="34" charset="-120"/>
-                <a:ea typeface="微軟正黑體" pitchFamily="34" charset="-120"/>
-              </a:rPr>
-              <a:t>浪的日子已經都過</a:t>
-            </a:r>
-            <a:r>
-              <a:rPr lang="zh-TW" altLang="en-US" sz="5400" b="1" dirty="0">
-                <a:solidFill>
-                  <a:srgbClr val="000066"/>
-                </a:solidFill>
-                <a:latin typeface="微軟正黑體" pitchFamily="34" charset="-120"/>
-                <a:ea typeface="微軟正黑體" pitchFamily="34" charset="-120"/>
-              </a:rPr>
-              <a:t>去</a:t>
-            </a:r>
-            <a:endParaRPr lang="en-US" altLang="zh-TW" sz="5400" b="1" dirty="0">
-              <a:solidFill>
-                <a:srgbClr val="000066"/>
-              </a:solidFill>
-              <a:latin typeface="微軟正黑體" pitchFamily="34" charset="-120"/>
-              <a:ea typeface="微軟正黑體" pitchFamily="34" charset="-120"/>
-            </a:endParaRPr>
-          </a:p>
-          <a:p>
-            <a:pPr algn="ctr">
-              <a:buNone/>
-            </a:pPr>
-            <a:r>
-              <a:rPr lang="zh-TW" altLang="en-US" sz="5400" b="1" dirty="0">
-                <a:solidFill>
-                  <a:srgbClr val="000066"/>
-                </a:solidFill>
-                <a:latin typeface="微軟正黑體" pitchFamily="34" charset="-120"/>
-                <a:ea typeface="微軟正黑體" pitchFamily="34" charset="-120"/>
-              </a:rPr>
-              <a:t>用</a:t>
-            </a:r>
-            <a:r>
-              <a:rPr lang="zh-TW" altLang="en-US" sz="5400" b="1" dirty="0">
-                <a:solidFill>
-                  <a:srgbClr val="000066"/>
-                </a:solidFill>
-                <a:latin typeface="微軟正黑體" pitchFamily="34" charset="-120"/>
-                <a:ea typeface="微軟正黑體" pitchFamily="34" charset="-120"/>
-              </a:rPr>
-              <a:t>信心去期待黎明</a:t>
-            </a:r>
-            <a:endParaRPr lang="en-US" sz="5400" b="1" dirty="0">
-              <a:solidFill>
-                <a:srgbClr val="000066"/>
-              </a:solidFill>
-              <a:latin typeface="微軟正黑體" pitchFamily="34" charset="-120"/>
-              <a:ea typeface="微軟正黑體" pitchFamily="34" charset="-120"/>
-            </a:endParaRPr>
           </a:p>
         </p:txBody>
       </p:sp>
     </p:spTree>
+    <p:extLst>
+      <p:ext uri="{BB962C8B-B14F-4D97-AF65-F5344CB8AC3E}">
+        <p14:creationId xmlns:p14="http://schemas.microsoft.com/office/powerpoint/2010/main" val="388492399"/>
+      </p:ext>
+    </p:extLst>
   </p:cSld>
   <p:clrMapOvr>
     <a:masterClrMapping/>
@@ -3307,7 +3140,13 @@
   <p:cSld>
     <p:spTree>
       <p:nvGrpSpPr>
-        <p:cNvPr id="1" name=""/>
+        <p:cNvPr id="1" name="">
+          <a:extLst>
+            <a:ext uri="{FF2B5EF4-FFF2-40B4-BE49-F238E27FC236}">
+              <a16:creationId xmlns:a16="http://schemas.microsoft.com/office/drawing/2014/main" id="{499F6A04-361B-D03C-72FC-83746A3861FC}"/>
+            </a:ext>
+          </a:extLst>
+        </p:cNvPr>
         <p:cNvGrpSpPr/>
         <p:nvPr/>
       </p:nvGrpSpPr>
@@ -3321,23 +3160,37 @@
       </p:grpSpPr>
       <p:sp>
         <p:nvSpPr>
-          <p:cNvPr id="4" name="Title 3"/>
-          <p:cNvSpPr>
-            <a:spLocks noGrp="1"/>
-          </p:cNvSpPr>
-          <p:nvPr>
-            <p:ph type="title"/>
-          </p:nvPr>
-        </p:nvSpPr>
-        <p:spPr/>
-        <p:txBody>
-          <a:bodyPr>
+          <p:cNvPr id="5" name="內容版面配置區 4">
+            <a:extLst>
+              <a:ext uri="{FF2B5EF4-FFF2-40B4-BE49-F238E27FC236}">
+                <a16:creationId xmlns:a16="http://schemas.microsoft.com/office/drawing/2014/main" id="{EE77592B-EE8B-614D-4160-CDFC7BCE80DB}"/>
+              </a:ext>
+            </a:extLst>
+          </p:cNvPr>
+          <p:cNvSpPr>
+            <a:spLocks noGrp="1"/>
+          </p:cNvSpPr>
+          <p:nvPr>
+            <p:ph idx="1"/>
+          </p:nvPr>
+        </p:nvSpPr>
+        <p:spPr>
+          <a:xfrm>
+            <a:off x="0" y="2084851"/>
+            <a:ext cx="12192000" cy="2404863"/>
+          </a:xfrm>
+        </p:spPr>
+        <p:txBody>
+          <a:bodyPr anchor="ctr">
             <a:normAutofit/>
           </a:bodyPr>
           <a:lstStyle/>
           <a:p>
-            <a:r>
-              <a:rPr lang="zh-TW" altLang="en-US" sz="4800" b="1" dirty="0">
+            <a:pPr algn="ctr">
+              <a:buNone/>
+            </a:pPr>
+            <a:r>
+              <a:rPr lang="zh-TW" altLang="en-US" sz="6400" b="1" dirty="0">
                 <a:solidFill>
                   <a:srgbClr val="000066"/>
                 </a:solidFill>
@@ -3346,7 +3199,22 @@
               </a:rPr>
               <a:t>留一顆心填滿耶穌</a:t>
             </a:r>
-            <a:endParaRPr lang="en-US" sz="4800" b="1" dirty="0">
+          </a:p>
+          <a:p>
+            <a:pPr algn="ctr">
+              <a:buNone/>
+            </a:pPr>
+            <a:r>
+              <a:rPr lang="zh-TW" altLang="en-US" sz="6400" b="1" dirty="0">
+                <a:solidFill>
+                  <a:srgbClr val="000066"/>
+                </a:solidFill>
+                <a:latin typeface="微軟正黑體" pitchFamily="34" charset="-120"/>
+                <a:ea typeface="微軟正黑體" pitchFamily="34" charset="-120"/>
+              </a:rPr>
+              <a:t>將我心換祢</a:t>
+            </a:r>
+            <a:endParaRPr lang="en-US" altLang="zh-TW" sz="6400" b="1" dirty="0">
               <a:solidFill>
                 <a:srgbClr val="000066"/>
               </a:solidFill>
@@ -3358,176 +3226,78 @@
       </p:sp>
       <p:sp>
         <p:nvSpPr>
-          <p:cNvPr id="5" name="Content Placeholder 4"/>
-          <p:cNvSpPr>
-            <a:spLocks noGrp="1"/>
-          </p:cNvSpPr>
-          <p:nvPr>
-            <p:ph idx="1"/>
-          </p:nvPr>
+          <p:cNvPr id="3" name="TextBox 2">
+            <a:extLst>
+              <a:ext uri="{FF2B5EF4-FFF2-40B4-BE49-F238E27FC236}">
+                <a16:creationId xmlns:a16="http://schemas.microsoft.com/office/drawing/2014/main" id="{FA175DD0-F211-14DE-420F-4A50F79B6BD2}"/>
+              </a:ext>
+            </a:extLst>
+          </p:cNvPr>
+          <p:cNvSpPr txBox="1"/>
+          <p:nvPr/>
         </p:nvSpPr>
         <p:spPr>
           <a:xfrm>
-            <a:off x="1524000" y="1600201"/>
-            <a:ext cx="9144000" cy="4525963"/>
+            <a:off x="0" y="5157193"/>
+            <a:ext cx="12192000" cy="584775"/>
           </a:xfrm>
+          <a:prstGeom prst="rect">
+            <a:avLst/>
+          </a:prstGeom>
+          <a:noFill/>
         </p:spPr>
         <p:txBody>
-          <a:bodyPr>
-            <a:normAutofit/>
+          <a:bodyPr wrap="square" rtlCol="0">
+            <a:spAutoFit/>
           </a:bodyPr>
           <a:lstStyle/>
           <a:p>
-            <a:pPr algn="ctr">
-              <a:buNone/>
-            </a:pPr>
-            <a:r>
-              <a:rPr lang="zh-TW" altLang="en-US" sz="5400" b="1" dirty="0">
+            <a:pPr algn="ctr"/>
+            <a:r>
+              <a:rPr lang="en-US" sz="3200" b="1" dirty="0">
                 <a:solidFill>
                   <a:srgbClr val="000066"/>
                 </a:solidFill>
-                <a:latin typeface="微軟正黑體" pitchFamily="34" charset="-120"/>
-                <a:ea typeface="微軟正黑體" pitchFamily="34" charset="-120"/>
+                <a:latin typeface="Microsoft JhengHei" panose="020B0604030504040204" pitchFamily="34" charset="-120"/>
+                <a:ea typeface="Microsoft JhengHei" panose="020B0604030504040204" pitchFamily="34" charset="-120"/>
               </a:rPr>
-              <a:t>淺嘗那林中的</a:t>
-            </a:r>
-            <a:r>
-              <a:rPr lang="zh-TW" altLang="en-US" sz="5400" b="1" dirty="0">
+              <a:t>( </a:t>
+            </a:r>
+            <a:r>
+              <a:rPr lang="zh-CN" altLang="en-US" sz="3200" b="1" dirty="0">
                 <a:solidFill>
                   <a:srgbClr val="000066"/>
                 </a:solidFill>
-                <a:latin typeface="微軟正黑體" pitchFamily="34" charset="-120"/>
-                <a:ea typeface="微軟正黑體" pitchFamily="34" charset="-120"/>
+                <a:latin typeface="Microsoft JhengHei" panose="020B0604030504040204" pitchFamily="34" charset="-120"/>
+                <a:ea typeface="Microsoft JhengHei" panose="020B0604030504040204" pitchFamily="34" charset="-120"/>
               </a:rPr>
-              <a:t>果</a:t>
-            </a:r>
-            <a:endParaRPr lang="en-US" altLang="zh-TW" sz="5400" b="1" dirty="0">
+              <a:t>正歌</a:t>
+            </a:r>
+            <a:r>
+              <a:rPr lang="en-US" sz="3200" b="1" dirty="0">
+                <a:solidFill>
+                  <a:srgbClr val="000066"/>
+                </a:solidFill>
+                <a:latin typeface="Microsoft JhengHei" panose="020B0604030504040204" pitchFamily="34" charset="-120"/>
+                <a:ea typeface="Microsoft JhengHei" panose="020B0604030504040204" pitchFamily="34" charset="-120"/>
+              </a:rPr>
+              <a:t> )</a:t>
+            </a:r>
+            <a:endParaRPr lang="vi-VN" sz="3200" b="1" dirty="0">
               <a:solidFill>
                 <a:srgbClr val="000066"/>
               </a:solidFill>
-              <a:latin typeface="微軟正黑體" pitchFamily="34" charset="-120"/>
-              <a:ea typeface="微軟正黑體" pitchFamily="34" charset="-120"/>
+              <a:ea typeface="Microsoft JhengHei" panose="020B0604030504040204" pitchFamily="34" charset="-120"/>
             </a:endParaRPr>
           </a:p>
-          <a:p>
-            <a:pPr algn="ctr">
-              <a:buNone/>
-            </a:pPr>
-            <a:r>
-              <a:rPr lang="zh-TW" altLang="en-US" sz="5400" b="1" dirty="0">
-                <a:solidFill>
-                  <a:srgbClr val="000066"/>
-                </a:solidFill>
-                <a:latin typeface="微軟正黑體" pitchFamily="34" charset="-120"/>
-                <a:ea typeface="微軟正黑體" pitchFamily="34" charset="-120"/>
-              </a:rPr>
-              <a:t>白</a:t>
-            </a:r>
-            <a:r>
-              <a:rPr lang="zh-TW" altLang="en-US" sz="5400" b="1" dirty="0">
-                <a:solidFill>
-                  <a:srgbClr val="000066"/>
-                </a:solidFill>
-                <a:latin typeface="微軟正黑體" pitchFamily="34" charset="-120"/>
-                <a:ea typeface="微軟正黑體" pitchFamily="34" charset="-120"/>
-              </a:rPr>
-              <a:t>花中的</a:t>
-            </a:r>
-            <a:r>
-              <a:rPr lang="zh-TW" altLang="en-US" sz="5400" b="1" dirty="0">
-                <a:solidFill>
-                  <a:srgbClr val="000066"/>
-                </a:solidFill>
-                <a:latin typeface="微軟正黑體" pitchFamily="34" charset="-120"/>
-                <a:ea typeface="微軟正黑體" pitchFamily="34" charset="-120"/>
-              </a:rPr>
-              <a:t>蜜</a:t>
-            </a:r>
-            <a:endParaRPr lang="en-US" altLang="zh-TW" sz="5400" b="1" dirty="0">
-              <a:solidFill>
-                <a:srgbClr val="000066"/>
-              </a:solidFill>
-              <a:latin typeface="微軟正黑體" pitchFamily="34" charset="-120"/>
-              <a:ea typeface="微軟正黑體" pitchFamily="34" charset="-120"/>
-            </a:endParaRPr>
-          </a:p>
-          <a:p>
-            <a:pPr algn="ctr">
-              <a:buNone/>
-            </a:pPr>
-            <a:r>
-              <a:rPr lang="zh-TW" altLang="en-US" sz="5400" b="1" dirty="0">
-                <a:solidFill>
-                  <a:srgbClr val="000066"/>
-                </a:solidFill>
-                <a:latin typeface="微軟正黑體" pitchFamily="34" charset="-120"/>
-                <a:ea typeface="微軟正黑體" pitchFamily="34" charset="-120"/>
-              </a:rPr>
-              <a:t>耶</a:t>
-            </a:r>
-            <a:r>
-              <a:rPr lang="zh-TW" altLang="en-US" sz="5400" b="1" dirty="0">
-                <a:solidFill>
-                  <a:srgbClr val="000066"/>
-                </a:solidFill>
-                <a:latin typeface="微軟正黑體" pitchFamily="34" charset="-120"/>
-                <a:ea typeface="微軟正黑體" pitchFamily="34" charset="-120"/>
-              </a:rPr>
-              <a:t>和華用慈愛手所預備</a:t>
-            </a:r>
-            <a:r>
-              <a:rPr lang="zh-TW" altLang="en-US" sz="5400" b="1" dirty="0">
-                <a:solidFill>
-                  <a:srgbClr val="000066"/>
-                </a:solidFill>
-                <a:latin typeface="微軟正黑體" pitchFamily="34" charset="-120"/>
-                <a:ea typeface="微軟正黑體" pitchFamily="34" charset="-120"/>
-              </a:rPr>
-              <a:t>的</a:t>
-            </a:r>
-            <a:endParaRPr lang="en-US" altLang="zh-TW" sz="5400" b="1" dirty="0">
-              <a:solidFill>
-                <a:srgbClr val="000066"/>
-              </a:solidFill>
-              <a:latin typeface="微軟正黑體" pitchFamily="34" charset="-120"/>
-              <a:ea typeface="微軟正黑體" pitchFamily="34" charset="-120"/>
-            </a:endParaRPr>
-          </a:p>
-          <a:p>
-            <a:pPr algn="ctr">
-              <a:buNone/>
-            </a:pPr>
-            <a:r>
-              <a:rPr lang="zh-TW" altLang="en-US" sz="5400" b="1" dirty="0">
-                <a:solidFill>
-                  <a:srgbClr val="000066"/>
-                </a:solidFill>
-                <a:latin typeface="微軟正黑體" pitchFamily="34" charset="-120"/>
-                <a:ea typeface="微軟正黑體" pitchFamily="34" charset="-120"/>
-              </a:rPr>
-              <a:t>這</a:t>
-            </a:r>
-            <a:r>
-              <a:rPr lang="zh-TW" altLang="en-US" sz="5400" b="1" dirty="0">
-                <a:solidFill>
-                  <a:srgbClr val="000066"/>
-                </a:solidFill>
-                <a:latin typeface="微軟正黑體" pitchFamily="34" charset="-120"/>
-                <a:ea typeface="微軟正黑體" pitchFamily="34" charset="-120"/>
-              </a:rPr>
-              <a:t>一生我全都享盡</a:t>
-            </a:r>
-            <a:endParaRPr lang="en-US" sz="5400" b="1" dirty="0">
-              <a:solidFill>
-                <a:srgbClr val="000066"/>
-              </a:solidFill>
-              <a:latin typeface="微軟正黑體" pitchFamily="34" charset="-120"/>
-              <a:ea typeface="微軟正黑體" pitchFamily="34" charset="-120"/>
-            </a:endParaRPr>
-          </a:p>
         </p:txBody>
       </p:sp>
     </p:spTree>
+    <p:extLst>
+      <p:ext uri="{BB962C8B-B14F-4D97-AF65-F5344CB8AC3E}">
+        <p14:creationId xmlns:p14="http://schemas.microsoft.com/office/powerpoint/2010/main" val="3885075056"/>
+      </p:ext>
+    </p:extLst>
   </p:cSld>
   <p:clrMapOvr>
     <a:masterClrMapping/>
@@ -3540,7 +3310,13 @@
   <p:cSld>
     <p:spTree>
       <p:nvGrpSpPr>
-        <p:cNvPr id="1" name=""/>
+        <p:cNvPr id="1" name="">
+          <a:extLst>
+            <a:ext uri="{FF2B5EF4-FFF2-40B4-BE49-F238E27FC236}">
+              <a16:creationId xmlns:a16="http://schemas.microsoft.com/office/drawing/2014/main" id="{872E93F1-37D5-A961-2043-9CDE4825F8FC}"/>
+            </a:ext>
+          </a:extLst>
+        </p:cNvPr>
         <p:cNvGrpSpPr/>
         <p:nvPr/>
       </p:nvGrpSpPr>
@@ -3554,44 +3330,176 @@
       </p:grpSpPr>
       <p:sp>
         <p:nvSpPr>
-          <p:cNvPr id="4" name="Title 3"/>
-          <p:cNvSpPr>
-            <a:spLocks noGrp="1"/>
-          </p:cNvSpPr>
-          <p:nvPr>
-            <p:ph type="title"/>
-          </p:nvPr>
-        </p:nvSpPr>
-        <p:spPr/>
-        <p:txBody>
-          <a:bodyPr>
+          <p:cNvPr id="5" name="內容版面配置區 4">
+            <a:extLst>
+              <a:ext uri="{FF2B5EF4-FFF2-40B4-BE49-F238E27FC236}">
+                <a16:creationId xmlns:a16="http://schemas.microsoft.com/office/drawing/2014/main" id="{F5B6321D-7493-9928-6F12-412A487B1A1D}"/>
+              </a:ext>
+            </a:extLst>
+          </p:cNvPr>
+          <p:cNvSpPr>
+            <a:spLocks noGrp="1"/>
+          </p:cNvSpPr>
+          <p:nvPr>
+            <p:ph idx="1"/>
+          </p:nvPr>
+        </p:nvSpPr>
+        <p:spPr>
+          <a:xfrm>
+            <a:off x="0" y="2084851"/>
+            <a:ext cx="12192000" cy="2404863"/>
+          </a:xfrm>
+        </p:spPr>
+        <p:txBody>
+          <a:bodyPr anchor="ctr">
             <a:normAutofit/>
           </a:bodyPr>
           <a:lstStyle/>
           <a:p>
-            <a:r>
-              <a:rPr lang="zh-TW" altLang="en-US" sz="4800" b="1" dirty="0">
+            <a:pPr algn="ctr">
+              <a:buNone/>
+            </a:pPr>
+            <a:r>
+              <a:rPr lang="zh-TW" altLang="en-US" sz="6400" b="1" dirty="0">
                 <a:solidFill>
                   <a:srgbClr val="000066"/>
                 </a:solidFill>
                 <a:latin typeface="微軟正黑體" pitchFamily="34" charset="-120"/>
                 <a:ea typeface="微軟正黑體" pitchFamily="34" charset="-120"/>
               </a:rPr>
-              <a:t>留一顆心填滿耶穌</a:t>
-            </a:r>
-            <a:endParaRPr lang="en-US" sz="4800" b="1" dirty="0">
+              <a:t>流浪的日子已經都過去</a:t>
+            </a:r>
+          </a:p>
+          <a:p>
+            <a:pPr algn="ctr">
+              <a:buNone/>
+            </a:pPr>
+            <a:r>
+              <a:rPr lang="zh-TW" altLang="en-US" sz="6400" b="1" dirty="0">
+                <a:solidFill>
+                  <a:srgbClr val="000066"/>
+                </a:solidFill>
+                <a:latin typeface="微軟正黑體" pitchFamily="34" charset="-120"/>
+                <a:ea typeface="微軟正黑體" pitchFamily="34" charset="-120"/>
+              </a:rPr>
+              <a:t>用信心去期待黎明</a:t>
+            </a:r>
+          </a:p>
+        </p:txBody>
+      </p:sp>
+      <p:sp>
+        <p:nvSpPr>
+          <p:cNvPr id="3" name="TextBox 2">
+            <a:extLst>
+              <a:ext uri="{FF2B5EF4-FFF2-40B4-BE49-F238E27FC236}">
+                <a16:creationId xmlns:a16="http://schemas.microsoft.com/office/drawing/2014/main" id="{6809E6B5-DCEA-BCBF-58E5-508E2BA0BCB4}"/>
+              </a:ext>
+            </a:extLst>
+          </p:cNvPr>
+          <p:cNvSpPr txBox="1"/>
+          <p:nvPr/>
+        </p:nvSpPr>
+        <p:spPr>
+          <a:xfrm>
+            <a:off x="0" y="5157193"/>
+            <a:ext cx="12192000" cy="584775"/>
+          </a:xfrm>
+          <a:prstGeom prst="rect">
+            <a:avLst/>
+          </a:prstGeom>
+          <a:noFill/>
+        </p:spPr>
+        <p:txBody>
+          <a:bodyPr wrap="square" rtlCol="0">
+            <a:spAutoFit/>
+          </a:bodyPr>
+          <a:lstStyle/>
+          <a:p>
+            <a:pPr algn="ctr"/>
+            <a:r>
+              <a:rPr lang="en-US" sz="3200" b="1" dirty="0">
+                <a:solidFill>
+                  <a:srgbClr val="000066"/>
+                </a:solidFill>
+                <a:latin typeface="Microsoft JhengHei" panose="020B0604030504040204" pitchFamily="34" charset="-120"/>
+                <a:ea typeface="Microsoft JhengHei" panose="020B0604030504040204" pitchFamily="34" charset="-120"/>
+              </a:rPr>
+              <a:t>( </a:t>
+            </a:r>
+            <a:r>
+              <a:rPr lang="zh-CN" altLang="en-US" sz="3200" b="1" dirty="0">
+                <a:solidFill>
+                  <a:srgbClr val="000066"/>
+                </a:solidFill>
+                <a:latin typeface="Microsoft JhengHei" panose="020B0604030504040204" pitchFamily="34" charset="-120"/>
+                <a:ea typeface="Microsoft JhengHei" panose="020B0604030504040204" pitchFamily="34" charset="-120"/>
+              </a:rPr>
+              <a:t>正歌</a:t>
+            </a:r>
+            <a:r>
+              <a:rPr lang="en-US" sz="3200" b="1" dirty="0">
+                <a:solidFill>
+                  <a:srgbClr val="000066"/>
+                </a:solidFill>
+                <a:latin typeface="Microsoft JhengHei" panose="020B0604030504040204" pitchFamily="34" charset="-120"/>
+                <a:ea typeface="Microsoft JhengHei" panose="020B0604030504040204" pitchFamily="34" charset="-120"/>
+              </a:rPr>
+              <a:t> )</a:t>
+            </a:r>
+            <a:endParaRPr lang="vi-VN" sz="3200" b="1" dirty="0">
               <a:solidFill>
                 <a:srgbClr val="000066"/>
               </a:solidFill>
-              <a:latin typeface="微軟正黑體" pitchFamily="34" charset="-120"/>
-              <a:ea typeface="微軟正黑體" pitchFamily="34" charset="-120"/>
+              <a:ea typeface="Microsoft JhengHei" panose="020B0604030504040204" pitchFamily="34" charset="-120"/>
             </a:endParaRPr>
           </a:p>
         </p:txBody>
       </p:sp>
-      <p:sp>
-        <p:nvSpPr>
-          <p:cNvPr id="5" name="Content Placeholder 4"/>
+    </p:spTree>
+    <p:extLst>
+      <p:ext uri="{BB962C8B-B14F-4D97-AF65-F5344CB8AC3E}">
+        <p14:creationId xmlns:p14="http://schemas.microsoft.com/office/powerpoint/2010/main" val="2997006223"/>
+      </p:ext>
+    </p:extLst>
+  </p:cSld>
+  <p:clrMapOvr>
+    <a:masterClrMapping/>
+  </p:clrMapOvr>
+</p:sld>
+</file>
+
+<file path=ppt/slides/slide4.xml><?xml version="1.0" encoding="utf-8"?>
+<p:sld xmlns:a="http://schemas.openxmlformats.org/drawingml/2006/main" xmlns:r="http://schemas.openxmlformats.org/officeDocument/2006/relationships" xmlns:p="http://schemas.openxmlformats.org/presentationml/2006/main">
+  <p:cSld>
+    <p:spTree>
+      <p:nvGrpSpPr>
+        <p:cNvPr id="1" name="">
+          <a:extLst>
+            <a:ext uri="{FF2B5EF4-FFF2-40B4-BE49-F238E27FC236}">
+              <a16:creationId xmlns:a16="http://schemas.microsoft.com/office/drawing/2014/main" id="{B27A8E11-A68C-5886-BFFC-33BA98EF4CA3}"/>
+            </a:ext>
+          </a:extLst>
+        </p:cNvPr>
+        <p:cNvGrpSpPr/>
+        <p:nvPr/>
+      </p:nvGrpSpPr>
+      <p:grpSpPr>
+        <a:xfrm>
+          <a:off x="0" y="0"/>
+          <a:ext cx="0" cy="0"/>
+          <a:chOff x="0" y="0"/>
+          <a:chExt cx="0" cy="0"/>
+        </a:xfrm>
+      </p:grpSpPr>
+      <p:sp>
+        <p:nvSpPr>
+          <p:cNvPr id="5" name="內容版面配置區 4">
+            <a:extLst>
+              <a:ext uri="{FF2B5EF4-FFF2-40B4-BE49-F238E27FC236}">
+                <a16:creationId xmlns:a16="http://schemas.microsoft.com/office/drawing/2014/main" id="{3362CEB9-740D-569B-DC60-CC4E06A49CF3}"/>
+              </a:ext>
+            </a:extLst>
+          </p:cNvPr>
           <p:cNvSpPr>
             <a:spLocks noGrp="1"/>
           </p:cNvSpPr>
@@ -3601,12 +3509,12 @@
         </p:nvSpPr>
         <p:spPr>
           <a:xfrm>
-            <a:off x="1524000" y="1600201"/>
-            <a:ext cx="9144000" cy="4525963"/>
+            <a:off x="0" y="2084851"/>
+            <a:ext cx="12192000" cy="2404863"/>
           </a:xfrm>
         </p:spPr>
         <p:txBody>
-          <a:bodyPr>
+          <a:bodyPr anchor="ctr">
             <a:normAutofit/>
           </a:bodyPr>
           <a:lstStyle/>
@@ -3615,152 +3523,596 @@
               <a:buNone/>
             </a:pPr>
             <a:r>
-              <a:rPr lang="zh-TW" altLang="en-US" sz="5400" b="1" dirty="0">
+              <a:rPr lang="zh-TW" altLang="en-US" sz="6400" b="1" dirty="0">
                 <a:solidFill>
                   <a:srgbClr val="000066"/>
                 </a:solidFill>
                 <a:latin typeface="微軟正黑體" pitchFamily="34" charset="-120"/>
                 <a:ea typeface="微軟正黑體" pitchFamily="34" charset="-120"/>
               </a:rPr>
-              <a:t>祂說祂愛我依然如</a:t>
-            </a:r>
-            <a:r>
-              <a:rPr lang="zh-TW" altLang="en-US" sz="5400" b="1" dirty="0">
+              <a:t>淺嘗那林中的果</a:t>
+            </a:r>
+          </a:p>
+          <a:p>
+            <a:pPr algn="ctr">
+              <a:buNone/>
+            </a:pPr>
+            <a:r>
+              <a:rPr lang="zh-TW" altLang="en-US" sz="6400" b="1" dirty="0">
                 <a:solidFill>
                   <a:srgbClr val="000066"/>
                 </a:solidFill>
                 <a:latin typeface="微軟正黑體" pitchFamily="34" charset="-120"/>
                 <a:ea typeface="微軟正黑體" pitchFamily="34" charset="-120"/>
               </a:rPr>
-              <a:t>初</a:t>
-            </a:r>
-            <a:endParaRPr lang="en-US" altLang="zh-TW" sz="5400" b="1" dirty="0">
+              <a:t>百花中的蜜</a:t>
+            </a:r>
+          </a:p>
+        </p:txBody>
+      </p:sp>
+      <p:sp>
+        <p:nvSpPr>
+          <p:cNvPr id="3" name="TextBox 2">
+            <a:extLst>
+              <a:ext uri="{FF2B5EF4-FFF2-40B4-BE49-F238E27FC236}">
+                <a16:creationId xmlns:a16="http://schemas.microsoft.com/office/drawing/2014/main" id="{3FEE47C9-12B6-E8B8-6A6E-75EE9164743B}"/>
+              </a:ext>
+            </a:extLst>
+          </p:cNvPr>
+          <p:cNvSpPr txBox="1"/>
+          <p:nvPr/>
+        </p:nvSpPr>
+        <p:spPr>
+          <a:xfrm>
+            <a:off x="0" y="5157193"/>
+            <a:ext cx="12192000" cy="584775"/>
+          </a:xfrm>
+          <a:prstGeom prst="rect">
+            <a:avLst/>
+          </a:prstGeom>
+          <a:noFill/>
+        </p:spPr>
+        <p:txBody>
+          <a:bodyPr wrap="square" rtlCol="0">
+            <a:spAutoFit/>
+          </a:bodyPr>
+          <a:lstStyle/>
+          <a:p>
+            <a:pPr algn="ctr"/>
+            <a:r>
+              <a:rPr lang="en-US" sz="3200" b="1" dirty="0">
+                <a:solidFill>
+                  <a:srgbClr val="000066"/>
+                </a:solidFill>
+                <a:latin typeface="Microsoft JhengHei" panose="020B0604030504040204" pitchFamily="34" charset="-120"/>
+                <a:ea typeface="Microsoft JhengHei" panose="020B0604030504040204" pitchFamily="34" charset="-120"/>
+              </a:rPr>
+              <a:t>( </a:t>
+            </a:r>
+            <a:r>
+              <a:rPr lang="zh-CN" altLang="en-US" sz="3200" b="1" dirty="0">
+                <a:solidFill>
+                  <a:srgbClr val="000066"/>
+                </a:solidFill>
+                <a:latin typeface="Microsoft JhengHei" panose="020B0604030504040204" pitchFamily="34" charset="-120"/>
+                <a:ea typeface="Microsoft JhengHei" panose="020B0604030504040204" pitchFamily="34" charset="-120"/>
+              </a:rPr>
+              <a:t>正歌</a:t>
+            </a:r>
+            <a:r>
+              <a:rPr lang="en-US" sz="3200" b="1" dirty="0">
+                <a:solidFill>
+                  <a:srgbClr val="000066"/>
+                </a:solidFill>
+                <a:latin typeface="Microsoft JhengHei" panose="020B0604030504040204" pitchFamily="34" charset="-120"/>
+                <a:ea typeface="Microsoft JhengHei" panose="020B0604030504040204" pitchFamily="34" charset="-120"/>
+              </a:rPr>
+              <a:t> )</a:t>
+            </a:r>
+            <a:endParaRPr lang="vi-VN" sz="3200" b="1" dirty="0">
               <a:solidFill>
                 <a:srgbClr val="000066"/>
               </a:solidFill>
-              <a:latin typeface="微軟正黑體" pitchFamily="34" charset="-120"/>
-              <a:ea typeface="微軟正黑體" pitchFamily="34" charset="-120"/>
+              <a:ea typeface="Microsoft JhengHei" panose="020B0604030504040204" pitchFamily="34" charset="-120"/>
             </a:endParaRPr>
           </a:p>
+        </p:txBody>
+      </p:sp>
+    </p:spTree>
+    <p:extLst>
+      <p:ext uri="{BB962C8B-B14F-4D97-AF65-F5344CB8AC3E}">
+        <p14:creationId xmlns:p14="http://schemas.microsoft.com/office/powerpoint/2010/main" val="737524107"/>
+      </p:ext>
+    </p:extLst>
+  </p:cSld>
+  <p:clrMapOvr>
+    <a:masterClrMapping/>
+  </p:clrMapOvr>
+</p:sld>
+</file>
+
+<file path=ppt/slides/slide5.xml><?xml version="1.0" encoding="utf-8"?>
+<p:sld xmlns:a="http://schemas.openxmlformats.org/drawingml/2006/main" xmlns:r="http://schemas.openxmlformats.org/officeDocument/2006/relationships" xmlns:p="http://schemas.openxmlformats.org/presentationml/2006/main">
+  <p:cSld>
+    <p:spTree>
+      <p:nvGrpSpPr>
+        <p:cNvPr id="1" name="">
+          <a:extLst>
+            <a:ext uri="{FF2B5EF4-FFF2-40B4-BE49-F238E27FC236}">
+              <a16:creationId xmlns:a16="http://schemas.microsoft.com/office/drawing/2014/main" id="{E83080B2-9170-B4AE-AB6B-102D9F01F7C5}"/>
+            </a:ext>
+          </a:extLst>
+        </p:cNvPr>
+        <p:cNvGrpSpPr/>
+        <p:nvPr/>
+      </p:nvGrpSpPr>
+      <p:grpSpPr>
+        <a:xfrm>
+          <a:off x="0" y="0"/>
+          <a:ext cx="0" cy="0"/>
+          <a:chOff x="0" y="0"/>
+          <a:chExt cx="0" cy="0"/>
+        </a:xfrm>
+      </p:grpSpPr>
+      <p:sp>
+        <p:nvSpPr>
+          <p:cNvPr id="5" name="內容版面配置區 4">
+            <a:extLst>
+              <a:ext uri="{FF2B5EF4-FFF2-40B4-BE49-F238E27FC236}">
+                <a16:creationId xmlns:a16="http://schemas.microsoft.com/office/drawing/2014/main" id="{B9F5C916-9BC7-95D0-6A65-FD07600E7827}"/>
+              </a:ext>
+            </a:extLst>
+          </p:cNvPr>
+          <p:cNvSpPr>
+            <a:spLocks noGrp="1"/>
+          </p:cNvSpPr>
+          <p:nvPr>
+            <p:ph idx="1"/>
+          </p:nvPr>
+        </p:nvSpPr>
+        <p:spPr>
+          <a:xfrm>
+            <a:off x="0" y="2084851"/>
+            <a:ext cx="12192000" cy="2404863"/>
+          </a:xfrm>
+        </p:spPr>
+        <p:txBody>
+          <a:bodyPr anchor="ctr">
+            <a:normAutofit/>
+          </a:bodyPr>
+          <a:lstStyle/>
           <a:p>
             <a:pPr algn="ctr">
               <a:buNone/>
             </a:pPr>
             <a:r>
-              <a:rPr lang="zh-TW" altLang="en-US" sz="5400" b="1" dirty="0">
+              <a:rPr lang="zh-TW" altLang="en-US" sz="6400" b="1" dirty="0">
                 <a:solidFill>
                   <a:srgbClr val="000066"/>
                 </a:solidFill>
                 <a:latin typeface="微軟正黑體" pitchFamily="34" charset="-120"/>
                 <a:ea typeface="微軟正黑體" pitchFamily="34" charset="-120"/>
               </a:rPr>
-              <a:t>祂</a:t>
-            </a:r>
-            <a:r>
-              <a:rPr lang="zh-TW" altLang="en-US" sz="5400" b="1" dirty="0">
+              <a:t>嗯  耶和華用慈愛手所預備的</a:t>
+            </a:r>
+          </a:p>
+          <a:p>
+            <a:pPr algn="ctr">
+              <a:buNone/>
+            </a:pPr>
+            <a:r>
+              <a:rPr lang="zh-TW" altLang="en-US" sz="6400" b="1" dirty="0">
                 <a:solidFill>
                   <a:srgbClr val="000066"/>
                 </a:solidFill>
                 <a:latin typeface="微軟正黑體" pitchFamily="34" charset="-120"/>
                 <a:ea typeface="微軟正黑體" pitchFamily="34" charset="-120"/>
               </a:rPr>
-              <a:t>說祂永遠不離開</a:t>
-            </a:r>
-            <a:r>
-              <a:rPr lang="zh-TW" altLang="en-US" sz="5400" b="1" dirty="0">
+              <a:t>這一生我全都享盡</a:t>
+            </a:r>
+          </a:p>
+        </p:txBody>
+      </p:sp>
+      <p:sp>
+        <p:nvSpPr>
+          <p:cNvPr id="3" name="TextBox 2">
+            <a:extLst>
+              <a:ext uri="{FF2B5EF4-FFF2-40B4-BE49-F238E27FC236}">
+                <a16:creationId xmlns:a16="http://schemas.microsoft.com/office/drawing/2014/main" id="{5AAD1458-F7D1-6974-06C3-15AD29704C1A}"/>
+              </a:ext>
+            </a:extLst>
+          </p:cNvPr>
+          <p:cNvSpPr txBox="1"/>
+          <p:nvPr/>
+        </p:nvSpPr>
+        <p:spPr>
+          <a:xfrm>
+            <a:off x="0" y="5157193"/>
+            <a:ext cx="12192000" cy="584775"/>
+          </a:xfrm>
+          <a:prstGeom prst="rect">
+            <a:avLst/>
+          </a:prstGeom>
+          <a:noFill/>
+        </p:spPr>
+        <p:txBody>
+          <a:bodyPr wrap="square" rtlCol="0">
+            <a:spAutoFit/>
+          </a:bodyPr>
+          <a:lstStyle/>
+          <a:p>
+            <a:pPr algn="ctr"/>
+            <a:r>
+              <a:rPr lang="en-US" sz="3200" b="1" dirty="0">
+                <a:solidFill>
+                  <a:srgbClr val="000066"/>
+                </a:solidFill>
+                <a:latin typeface="Microsoft JhengHei" panose="020B0604030504040204" pitchFamily="34" charset="-120"/>
+                <a:ea typeface="Microsoft JhengHei" panose="020B0604030504040204" pitchFamily="34" charset="-120"/>
+              </a:rPr>
+              <a:t>( </a:t>
+            </a:r>
+            <a:r>
+              <a:rPr lang="zh-CN" altLang="en-US" sz="3200" b="1" dirty="0">
+                <a:solidFill>
+                  <a:srgbClr val="000066"/>
+                </a:solidFill>
+                <a:latin typeface="Microsoft JhengHei" panose="020B0604030504040204" pitchFamily="34" charset="-120"/>
+                <a:ea typeface="Microsoft JhengHei" panose="020B0604030504040204" pitchFamily="34" charset="-120"/>
+              </a:rPr>
+              <a:t>正歌</a:t>
+            </a:r>
+            <a:r>
+              <a:rPr lang="en-US" sz="3200" b="1" dirty="0">
+                <a:solidFill>
+                  <a:srgbClr val="000066"/>
+                </a:solidFill>
+                <a:latin typeface="Microsoft JhengHei" panose="020B0604030504040204" pitchFamily="34" charset="-120"/>
+                <a:ea typeface="Microsoft JhengHei" panose="020B0604030504040204" pitchFamily="34" charset="-120"/>
+              </a:rPr>
+              <a:t> )</a:t>
+            </a:r>
+            <a:endParaRPr lang="vi-VN" sz="3200" b="1" dirty="0">
+              <a:solidFill>
+                <a:srgbClr val="000066"/>
+              </a:solidFill>
+              <a:ea typeface="Microsoft JhengHei" panose="020B0604030504040204" pitchFamily="34" charset="-120"/>
+            </a:endParaRPr>
+          </a:p>
+        </p:txBody>
+      </p:sp>
+    </p:spTree>
+    <p:extLst>
+      <p:ext uri="{BB962C8B-B14F-4D97-AF65-F5344CB8AC3E}">
+        <p14:creationId xmlns:p14="http://schemas.microsoft.com/office/powerpoint/2010/main" val="4227665504"/>
+      </p:ext>
+    </p:extLst>
+  </p:cSld>
+  <p:clrMapOvr>
+    <a:masterClrMapping/>
+  </p:clrMapOvr>
+</p:sld>
+</file>
+
+<file path=ppt/slides/slide6.xml><?xml version="1.0" encoding="utf-8"?>
+<p:sld xmlns:a="http://schemas.openxmlformats.org/drawingml/2006/main" xmlns:r="http://schemas.openxmlformats.org/officeDocument/2006/relationships" xmlns:p="http://schemas.openxmlformats.org/presentationml/2006/main">
+  <p:cSld>
+    <p:spTree>
+      <p:nvGrpSpPr>
+        <p:cNvPr id="1" name="">
+          <a:extLst>
+            <a:ext uri="{FF2B5EF4-FFF2-40B4-BE49-F238E27FC236}">
+              <a16:creationId xmlns:a16="http://schemas.microsoft.com/office/drawing/2014/main" id="{FC29E1EC-FB1A-8F33-1A4E-8DB7E2F51A62}"/>
+            </a:ext>
+          </a:extLst>
+        </p:cNvPr>
+        <p:cNvGrpSpPr/>
+        <p:nvPr/>
+      </p:nvGrpSpPr>
+      <p:grpSpPr>
+        <a:xfrm>
+          <a:off x="0" y="0"/>
+          <a:ext cx="0" cy="0"/>
+          <a:chOff x="0" y="0"/>
+          <a:chExt cx="0" cy="0"/>
+        </a:xfrm>
+      </p:grpSpPr>
+      <p:sp>
+        <p:nvSpPr>
+          <p:cNvPr id="5" name="內容版面配置區 4">
+            <a:extLst>
+              <a:ext uri="{FF2B5EF4-FFF2-40B4-BE49-F238E27FC236}">
+                <a16:creationId xmlns:a16="http://schemas.microsoft.com/office/drawing/2014/main" id="{D327D1A1-C645-7BAF-4664-80C541DFB948}"/>
+              </a:ext>
+            </a:extLst>
+          </p:cNvPr>
+          <p:cNvSpPr>
+            <a:spLocks noGrp="1"/>
+          </p:cNvSpPr>
+          <p:nvPr>
+            <p:ph idx="1"/>
+          </p:nvPr>
+        </p:nvSpPr>
+        <p:spPr>
+          <a:xfrm>
+            <a:off x="0" y="2084851"/>
+            <a:ext cx="12192000" cy="2404863"/>
+          </a:xfrm>
+        </p:spPr>
+        <p:txBody>
+          <a:bodyPr anchor="ctr">
+            <a:normAutofit/>
+          </a:bodyPr>
+          <a:lstStyle/>
+          <a:p>
+            <a:pPr algn="ctr">
+              <a:buNone/>
+            </a:pPr>
+            <a:r>
+              <a:rPr lang="zh-TW" altLang="en-US" sz="6400" b="1" dirty="0">
                 <a:solidFill>
                   <a:srgbClr val="000066"/>
                 </a:solidFill>
                 <a:latin typeface="微軟正黑體" pitchFamily="34" charset="-120"/>
                 <a:ea typeface="微軟正黑體" pitchFamily="34" charset="-120"/>
               </a:rPr>
-              <a:t>我</a:t>
-            </a:r>
-            <a:endParaRPr lang="en-US" altLang="zh-TW" sz="5400" b="1" dirty="0">
+              <a:t>祂說祂愛我依然如初</a:t>
+            </a:r>
+          </a:p>
+          <a:p>
+            <a:pPr algn="ctr">
+              <a:buNone/>
+            </a:pPr>
+            <a:r>
+              <a:rPr lang="zh-TW" altLang="en-US" sz="6400" b="1" dirty="0">
+                <a:solidFill>
+                  <a:srgbClr val="000066"/>
+                </a:solidFill>
+                <a:latin typeface="微軟正黑體" pitchFamily="34" charset="-120"/>
+                <a:ea typeface="微軟正黑體" pitchFamily="34" charset="-120"/>
+              </a:rPr>
+              <a:t>祂說祂永遠不離開我</a:t>
+            </a:r>
+          </a:p>
+        </p:txBody>
+      </p:sp>
+      <p:sp>
+        <p:nvSpPr>
+          <p:cNvPr id="3" name="TextBox 2">
+            <a:extLst>
+              <a:ext uri="{FF2B5EF4-FFF2-40B4-BE49-F238E27FC236}">
+                <a16:creationId xmlns:a16="http://schemas.microsoft.com/office/drawing/2014/main" id="{23CD6FAD-2C91-CB02-50D3-287752732EEF}"/>
+              </a:ext>
+            </a:extLst>
+          </p:cNvPr>
+          <p:cNvSpPr txBox="1"/>
+          <p:nvPr/>
+        </p:nvSpPr>
+        <p:spPr>
+          <a:xfrm>
+            <a:off x="0" y="5157193"/>
+            <a:ext cx="12192000" cy="584775"/>
+          </a:xfrm>
+          <a:prstGeom prst="rect">
+            <a:avLst/>
+          </a:prstGeom>
+          <a:noFill/>
+        </p:spPr>
+        <p:txBody>
+          <a:bodyPr wrap="square" rtlCol="0">
+            <a:spAutoFit/>
+          </a:bodyPr>
+          <a:lstStyle/>
+          <a:p>
+            <a:pPr algn="ctr"/>
+            <a:r>
+              <a:rPr lang="en-US" sz="3200" b="1" dirty="0">
+                <a:solidFill>
+                  <a:srgbClr val="000066"/>
+                </a:solidFill>
+                <a:latin typeface="Microsoft JhengHei" panose="020B0604030504040204" pitchFamily="34" charset="-120"/>
+                <a:ea typeface="Microsoft JhengHei" panose="020B0604030504040204" pitchFamily="34" charset="-120"/>
+              </a:rPr>
+              <a:t>( </a:t>
+            </a:r>
+            <a:r>
+              <a:rPr lang="zh-CN" altLang="en-US" sz="3200" b="1" dirty="0">
+                <a:solidFill>
+                  <a:srgbClr val="000066"/>
+                </a:solidFill>
+                <a:latin typeface="Microsoft JhengHei" panose="020B0604030504040204" pitchFamily="34" charset="-120"/>
+                <a:ea typeface="Microsoft JhengHei" panose="020B0604030504040204" pitchFamily="34" charset="-120"/>
+              </a:rPr>
+              <a:t>副歌</a:t>
+            </a:r>
+            <a:r>
+              <a:rPr lang="en-US" sz="3200" b="1" dirty="0">
+                <a:solidFill>
+                  <a:srgbClr val="000066"/>
+                </a:solidFill>
+                <a:latin typeface="Microsoft JhengHei" panose="020B0604030504040204" pitchFamily="34" charset="-120"/>
+                <a:ea typeface="Microsoft JhengHei" panose="020B0604030504040204" pitchFamily="34" charset="-120"/>
+              </a:rPr>
+              <a:t> )</a:t>
+            </a:r>
+            <a:endParaRPr lang="vi-VN" sz="3200" b="1" dirty="0">
               <a:solidFill>
                 <a:srgbClr val="000066"/>
               </a:solidFill>
-              <a:latin typeface="微軟正黑體" pitchFamily="34" charset="-120"/>
-              <a:ea typeface="微軟正黑體" pitchFamily="34" charset="-120"/>
+              <a:ea typeface="Microsoft JhengHei" panose="020B0604030504040204" pitchFamily="34" charset="-120"/>
             </a:endParaRPr>
           </a:p>
+        </p:txBody>
+      </p:sp>
+    </p:spTree>
+    <p:extLst>
+      <p:ext uri="{BB962C8B-B14F-4D97-AF65-F5344CB8AC3E}">
+        <p14:creationId xmlns:p14="http://schemas.microsoft.com/office/powerpoint/2010/main" val="18673478"/>
+      </p:ext>
+    </p:extLst>
+  </p:cSld>
+  <p:clrMapOvr>
+    <a:masterClrMapping/>
+  </p:clrMapOvr>
+</p:sld>
+</file>
+
+<file path=ppt/slides/slide7.xml><?xml version="1.0" encoding="utf-8"?>
+<p:sld xmlns:a="http://schemas.openxmlformats.org/drawingml/2006/main" xmlns:r="http://schemas.openxmlformats.org/officeDocument/2006/relationships" xmlns:p="http://schemas.openxmlformats.org/presentationml/2006/main">
+  <p:cSld>
+    <p:spTree>
+      <p:nvGrpSpPr>
+        <p:cNvPr id="1" name="">
+          <a:extLst>
+            <a:ext uri="{FF2B5EF4-FFF2-40B4-BE49-F238E27FC236}">
+              <a16:creationId xmlns:a16="http://schemas.microsoft.com/office/drawing/2014/main" id="{45DE62F3-C104-95BE-1415-15A34D8F148B}"/>
+            </a:ext>
+          </a:extLst>
+        </p:cNvPr>
+        <p:cNvGrpSpPr/>
+        <p:nvPr/>
+      </p:nvGrpSpPr>
+      <p:grpSpPr>
+        <a:xfrm>
+          <a:off x="0" y="0"/>
+          <a:ext cx="0" cy="0"/>
+          <a:chOff x="0" y="0"/>
+          <a:chExt cx="0" cy="0"/>
+        </a:xfrm>
+      </p:grpSpPr>
+      <p:sp>
+        <p:nvSpPr>
+          <p:cNvPr id="5" name="內容版面配置區 4">
+            <a:extLst>
+              <a:ext uri="{FF2B5EF4-FFF2-40B4-BE49-F238E27FC236}">
+                <a16:creationId xmlns:a16="http://schemas.microsoft.com/office/drawing/2014/main" id="{C6FDEC89-21BE-59F0-DC6F-D25B67942720}"/>
+              </a:ext>
+            </a:extLst>
+          </p:cNvPr>
+          <p:cNvSpPr>
+            <a:spLocks noGrp="1"/>
+          </p:cNvSpPr>
+          <p:nvPr>
+            <p:ph idx="1"/>
+          </p:nvPr>
+        </p:nvSpPr>
+        <p:spPr>
+          <a:xfrm>
+            <a:off x="0" y="2084851"/>
+            <a:ext cx="12192000" cy="2404863"/>
+          </a:xfrm>
+        </p:spPr>
+        <p:txBody>
+          <a:bodyPr anchor="ctr">
+            <a:normAutofit/>
+          </a:bodyPr>
+          <a:lstStyle/>
           <a:p>
             <a:pPr algn="ctr">
               <a:buNone/>
             </a:pPr>
             <a:r>
-              <a:rPr lang="zh-TW" altLang="en-US" sz="5400" b="1" dirty="0">
+              <a:rPr lang="zh-TW" altLang="en-US" sz="6400" b="1" dirty="0">
                 <a:solidFill>
                   <a:srgbClr val="000066"/>
                 </a:solidFill>
                 <a:latin typeface="微軟正黑體" pitchFamily="34" charset="-120"/>
                 <a:ea typeface="微軟正黑體" pitchFamily="34" charset="-120"/>
               </a:rPr>
-              <a:t>祂</a:t>
-            </a:r>
-            <a:r>
-              <a:rPr lang="zh-TW" altLang="en-US" sz="5400" b="1" dirty="0">
+              <a:t>祂說有一天溫暖日頭不再出</a:t>
+            </a:r>
+          </a:p>
+          <a:p>
+            <a:pPr algn="ctr">
+              <a:buNone/>
+            </a:pPr>
+            <a:r>
+              <a:rPr lang="zh-TW" altLang="en-US" sz="6400" b="1" dirty="0">
                 <a:solidFill>
                   <a:srgbClr val="000066"/>
                 </a:solidFill>
                 <a:latin typeface="微軟正黑體" pitchFamily="34" charset="-120"/>
                 <a:ea typeface="微軟正黑體" pitchFamily="34" charset="-120"/>
               </a:rPr>
-              <a:t>說有一天溫暖日頭不再</a:t>
-            </a:r>
-            <a:r>
-              <a:rPr lang="zh-TW" altLang="en-US" sz="5400" b="1" dirty="0">
+              <a:t>祂的光永是我的路</a:t>
+            </a:r>
+          </a:p>
+        </p:txBody>
+      </p:sp>
+      <p:sp>
+        <p:nvSpPr>
+          <p:cNvPr id="3" name="TextBox 2">
+            <a:extLst>
+              <a:ext uri="{FF2B5EF4-FFF2-40B4-BE49-F238E27FC236}">
+                <a16:creationId xmlns:a16="http://schemas.microsoft.com/office/drawing/2014/main" id="{9D8E36A5-6670-8F36-7750-5E7094D78A67}"/>
+              </a:ext>
+            </a:extLst>
+          </p:cNvPr>
+          <p:cNvSpPr txBox="1"/>
+          <p:nvPr/>
+        </p:nvSpPr>
+        <p:spPr>
+          <a:xfrm>
+            <a:off x="0" y="5157193"/>
+            <a:ext cx="12192000" cy="584775"/>
+          </a:xfrm>
+          <a:prstGeom prst="rect">
+            <a:avLst/>
+          </a:prstGeom>
+          <a:noFill/>
+        </p:spPr>
+        <p:txBody>
+          <a:bodyPr wrap="square" rtlCol="0">
+            <a:spAutoFit/>
+          </a:bodyPr>
+          <a:lstStyle/>
+          <a:p>
+            <a:pPr algn="ctr"/>
+            <a:r>
+              <a:rPr lang="en-US" sz="3200" b="1" dirty="0">
                 <a:solidFill>
                   <a:srgbClr val="000066"/>
                 </a:solidFill>
-                <a:latin typeface="微軟正黑體" pitchFamily="34" charset="-120"/>
-                <a:ea typeface="微軟正黑體" pitchFamily="34" charset="-120"/>
+                <a:latin typeface="Microsoft JhengHei" panose="020B0604030504040204" pitchFamily="34" charset="-120"/>
+                <a:ea typeface="Microsoft JhengHei" panose="020B0604030504040204" pitchFamily="34" charset="-120"/>
               </a:rPr>
-              <a:t>出</a:t>
-            </a:r>
-            <a:endParaRPr lang="en-US" altLang="zh-TW" sz="5400" b="1" dirty="0">
+              <a:t>( </a:t>
+            </a:r>
+            <a:r>
+              <a:rPr lang="zh-CN" altLang="en-US" sz="3200" b="1" dirty="0">
+                <a:solidFill>
+                  <a:srgbClr val="000066"/>
+                </a:solidFill>
+                <a:latin typeface="Microsoft JhengHei" panose="020B0604030504040204" pitchFamily="34" charset="-120"/>
+                <a:ea typeface="Microsoft JhengHei" panose="020B0604030504040204" pitchFamily="34" charset="-120"/>
+              </a:rPr>
+              <a:t>副歌</a:t>
+            </a:r>
+            <a:r>
+              <a:rPr lang="en-US" sz="3200" b="1" dirty="0">
+                <a:solidFill>
+                  <a:srgbClr val="000066"/>
+                </a:solidFill>
+                <a:latin typeface="Microsoft JhengHei" panose="020B0604030504040204" pitchFamily="34" charset="-120"/>
+                <a:ea typeface="Microsoft JhengHei" panose="020B0604030504040204" pitchFamily="34" charset="-120"/>
+              </a:rPr>
+              <a:t> )</a:t>
+            </a:r>
+            <a:endParaRPr lang="vi-VN" sz="3200" b="1" dirty="0">
               <a:solidFill>
                 <a:srgbClr val="000066"/>
               </a:solidFill>
-              <a:latin typeface="微軟正黑體" pitchFamily="34" charset="-120"/>
-              <a:ea typeface="微軟正黑體" pitchFamily="34" charset="-120"/>
+              <a:ea typeface="Microsoft JhengHei" panose="020B0604030504040204" pitchFamily="34" charset="-120"/>
             </a:endParaRPr>
           </a:p>
-          <a:p>
-            <a:pPr algn="ctr">
-              <a:buNone/>
-            </a:pPr>
-            <a:r>
-              <a:rPr lang="zh-TW" altLang="en-US" sz="5400" b="1" dirty="0">
-                <a:solidFill>
-                  <a:srgbClr val="000066"/>
-                </a:solidFill>
-                <a:latin typeface="微軟正黑體" pitchFamily="34" charset="-120"/>
-                <a:ea typeface="微軟正黑體" pitchFamily="34" charset="-120"/>
-              </a:rPr>
-              <a:t>祂</a:t>
-            </a:r>
-            <a:r>
-              <a:rPr lang="zh-TW" altLang="en-US" sz="5400" b="1" dirty="0">
-                <a:solidFill>
-                  <a:srgbClr val="000066"/>
-                </a:solidFill>
-                <a:latin typeface="微軟正黑體" pitchFamily="34" charset="-120"/>
-                <a:ea typeface="微軟正黑體" pitchFamily="34" charset="-120"/>
-              </a:rPr>
-              <a:t>的光永是我的路</a:t>
-            </a:r>
-            <a:endParaRPr lang="en-US" sz="5400" b="1" dirty="0">
-              <a:solidFill>
-                <a:srgbClr val="000066"/>
-              </a:solidFill>
-              <a:latin typeface="微軟正黑體" pitchFamily="34" charset="-120"/>
-              <a:ea typeface="微軟正黑體" pitchFamily="34" charset="-120"/>
-            </a:endParaRPr>
-          </a:p>
         </p:txBody>
       </p:sp>
     </p:spTree>
+    <p:extLst>
+      <p:ext uri="{BB962C8B-B14F-4D97-AF65-F5344CB8AC3E}">
+        <p14:creationId xmlns:p14="http://schemas.microsoft.com/office/powerpoint/2010/main" val="200297030"/>
+      </p:ext>
+    </p:extLst>
   </p:cSld>
   <p:clrMapOvr>
     <a:masterClrMapping/>
